--- a/presentation/Module-8_Common-Pitfalls-and-Anti-Patterns.pptx
+++ b/presentation/Module-8_Common-Pitfalls-and-Anti-Patterns.pptx
@@ -16,10 +16,9 @@
     <p:sldId id="264" r:id="rId10"/>
     <p:sldId id="265" r:id="rId11"/>
     <p:sldId id="266" r:id="rId12"/>
-    <p:sldId id="267" r:id="rId13"/>
   </p:sldIdLst>
   <p:notesMasterIdLst>
-    <p:notesMasterId r:id="rId14"/>
+    <p:notesMasterId r:id="rId13"/>
   </p:notesMasterIdLst>
   <p:sldSz cx="12192000" cy="6858000"/>
   <p:notesSz cx="6858000" cy="12192000"/>
@@ -713,94 +712,6 @@
             <a:fld id="{F7021451-1387-4CA6-816F-3879F97B5CBC}" type="slidenum">
               <a:rPr lang="en-US"/>
               <a:t>11</a:t>
-            </a:fld>
-            <a:endParaRPr lang="en-US"/>
-          </a:p>
-        </p:txBody>
-      </p:sp>
-    </p:spTree>
-    <p:extLst>
-      <p:ext uri="{BB962C8B-B14F-4D97-AF65-F5344CB8AC3E}">
-        <p14:creationId xmlns:p14="http://schemas.microsoft.com/office/powerpoint/2010/main" val="1024086991"/>
-      </p:ext>
-    </p:extLst>
-  </p:cSld>
-  <p:clrMapOvr>
-    <a:masterClrMapping/>
-  </p:clrMapOvr>
-</p:notes>
-</file>
-
-<file path=ppt/notesSlides/notesSlide12.xml><?xml version="1.0" encoding="utf-8"?>
-<p:notes xmlns:a="http://schemas.openxmlformats.org/drawingml/2006/main" xmlns:r="http://schemas.openxmlformats.org/officeDocument/2006/relationships" xmlns:p="http://schemas.openxmlformats.org/presentationml/2006/main">
-  <p:cSld>
-    <p:spTree>
-      <p:nvGrpSpPr>
-        <p:cNvPr id="1" name=""/>
-        <p:cNvGrpSpPr/>
-        <p:nvPr/>
-      </p:nvGrpSpPr>
-      <p:grpSpPr>
-        <a:xfrm>
-          <a:off x="0" y="0"/>
-          <a:ext cx="0" cy="0"/>
-          <a:chOff x="0" y="0"/>
-          <a:chExt cx="0" cy="0"/>
-        </a:xfrm>
-      </p:grpSpPr>
-      <p:sp>
-        <p:nvSpPr>
-          <p:cNvPr id="2" name="Slide Image Placeholder 1"/>
-          <p:cNvSpPr>
-            <a:spLocks noGrp="1" noRot="1" noChangeAspect="1"/>
-          </p:cNvSpPr>
-          <p:nvPr>
-            <p:ph type="sldImg"/>
-          </p:nvPr>
-        </p:nvSpPr>
-        <p:spPr/>
-      </p:sp>
-      <p:sp>
-        <p:nvSpPr>
-          <p:cNvPr id="3" name="Notes Placeholder 2"/>
-          <p:cNvSpPr>
-            <a:spLocks noGrp="1"/>
-          </p:cNvSpPr>
-          <p:nvPr>
-            <p:ph type="body" idx="1"/>
-          </p:nvPr>
-        </p:nvSpPr>
-        <p:spPr/>
-        <p:txBody>
-          <a:bodyPr/>
-          <a:lstStyle/>
-          <a:p>
-            <a:r>
-              <a:rPr lang="en-US" dirty="0"/>
-              <a:t/>
-            </a:r>
-            <a:endParaRPr lang="en-US" dirty="0"/>
-          </a:p>
-        </p:txBody>
-      </p:sp>
-      <p:sp>
-        <p:nvSpPr>
-          <p:cNvPr id="4" name="Slide Number Placeholder 3"/>
-          <p:cNvSpPr>
-            <a:spLocks noGrp="1"/>
-          </p:cNvSpPr>
-          <p:nvPr>
-            <p:ph type="sldNum" sz="quarter" idx="10"/>
-          </p:nvPr>
-        </p:nvSpPr>
-        <p:spPr/>
-        <p:txBody>
-          <a:bodyPr/>
-          <a:lstStyle/>
-          <a:p>
-            <a:fld id="{F7021451-1387-4CA6-816F-3879F97B5CBC}" type="slidenum">
-              <a:rPr lang="en-US"/>
-              <a:t>12</a:t>
             </a:fld>
             <a:endParaRPr lang="en-US"/>
           </a:p>
@@ -2454,7 +2365,7 @@
                           <a:ea typeface="Calibri" pitchFamily="34" charset="-122"/>
                           <a:cs typeface="Calibri" pitchFamily="34" charset="-120"/>
                         </a:rPr>
-                        <a:t>Skipping converge or ignoring analyze findings</a:t>
+                        <a:t>Stale checklists or ignored analyze findings</a:t>
                       </a:r>
                       <a:endParaRPr lang="en-US" sz="1300" dirty="0">
                         <a:latin typeface="Calibri" charset="0"/>
@@ -2854,7 +2765,7 @@
                           <a:ea typeface="Calibri" pitchFamily="34" charset="-122"/>
                           <a:cs typeface="Calibri" pitchFamily="34" charset="-120"/>
                         </a:rPr>
-                        <a:t>Workflow reference (analyze, converge)</a:t>
+                        <a:t>Workflow reference (checklist, analyze)</a:t>
                       </a:r>
                       <a:endParaRPr lang="en-US" sz="1300" dirty="0">
                         <a:latin typeface="Calibri" charset="0"/>
@@ -3384,260 +3295,6 @@
 </p:sld>
 </file>
 
-<file path=ppt/slides/slide12.xml><?xml version="1.0" encoding="utf-8"?>
-<p:sld xmlns:a="http://schemas.openxmlformats.org/drawingml/2006/main" xmlns:r="http://schemas.openxmlformats.org/officeDocument/2006/relationships" xmlns:p="http://schemas.openxmlformats.org/presentationml/2006/main">
-  <p:cSld name="Slide 12">
-    <p:bg>
-      <p:bgPr>
-        <a:solidFill>
-          <a:srgbClr val="FFFFFF"/>
-        </a:solidFill>
-      </p:bgPr>
-    </p:bg>
-    <p:spTree>
-      <p:nvGrpSpPr>
-        <p:cNvPr id="1" name=""/>
-        <p:cNvGrpSpPr/>
-        <p:nvPr/>
-      </p:nvGrpSpPr>
-      <p:grpSpPr>
-        <a:xfrm>
-          <a:off x="0" y="0"/>
-          <a:ext cx="0" cy="0"/>
-          <a:chOff x="0" y="0"/>
-          <a:chExt cx="0" cy="0"/>
-        </a:xfrm>
-      </p:grpSpPr>
-      <p:sp>
-        <p:nvSpPr>
-          <p:cNvPr id="2" name="Shape 0"/>
-          <p:cNvSpPr/>
-          <p:nvPr/>
-        </p:nvSpPr>
-        <p:spPr>
-          <a:xfrm>
-            <a:off x="548640" y="1828800"/>
-            <a:ext cx="11094415" cy="2377440"/>
-          </a:xfrm>
-          <a:prstGeom prst="roundRect">
-            <a:avLst>
-              <a:gd name="adj" fmla="val 4615"/>
-            </a:avLst>
-          </a:prstGeom>
-          <a:solidFill>
-            <a:srgbClr val="F2F5F9"/>
-          </a:solidFill>
-          <a:ln w="15875">
-            <a:solidFill>
-              <a:srgbClr val="C0504D"/>
-            </a:solidFill>
-            <a:prstDash val="solid"/>
-          </a:ln>
-        </p:spPr>
-      </p:sp>
-      <p:sp>
-        <p:nvSpPr>
-          <p:cNvPr id="3" name="Text 1"/>
-          <p:cNvSpPr/>
-          <p:nvPr/>
-        </p:nvSpPr>
-        <p:spPr>
-          <a:xfrm>
-            <a:off x="1005840" y="2103120"/>
-            <a:ext cx="10180015" cy="365760"/>
-          </a:xfrm>
-          <a:prstGeom prst="rect">
-            <a:avLst/>
-          </a:prstGeom>
-          <a:noFill/>
-          <a:ln/>
-        </p:spPr>
-        <p:txBody>
-          <a:bodyPr wrap="square" rtlCol="0" anchor="ctr"/>
-          <a:lstStyle/>
-          <a:p>
-            <a:pPr indent="0" marL="0">
-              <a:buNone/>
-            </a:pPr>
-            <a:r>
-              <a:rPr lang="en-US" sz="1300" b="1" spc="150" kern="0" dirty="0">
-                <a:solidFill>
-                  <a:srgbClr val="C0504D"/>
-                </a:solidFill>
-                <a:latin typeface="Calibri" pitchFamily="34" charset="0"/>
-                <a:ea typeface="Calibri" pitchFamily="34" charset="-122"/>
-                <a:cs typeface="Calibri" pitchFamily="34" charset="-120"/>
-              </a:rPr>
-              <a:t>HANDS-ON NEXT</a:t>
-            </a:r>
-            <a:endParaRPr lang="en-US" sz="1300" dirty="0"/>
-          </a:p>
-        </p:txBody>
-      </p:sp>
-      <p:sp>
-        <p:nvSpPr>
-          <p:cNvPr id="4" name="Text 2"/>
-          <p:cNvSpPr/>
-          <p:nvPr/>
-        </p:nvSpPr>
-        <p:spPr>
-          <a:xfrm>
-            <a:off x="1005840" y="2514600"/>
-            <a:ext cx="10180015" cy="1463040"/>
-          </a:xfrm>
-          <a:prstGeom prst="rect">
-            <a:avLst/>
-          </a:prstGeom>
-          <a:noFill/>
-          <a:ln/>
-        </p:spPr>
-        <p:txBody>
-          <a:bodyPr wrap="square" rtlCol="0" anchor="t"/>
-          <a:lstStyle/>
-          <a:p>
-            <a:pPr indent="0" marL="0">
-              <a:buNone/>
-            </a:pPr>
-            <a:r>
-              <a:rPr lang="en-US" sz="1700" dirty="0">
-                <a:solidFill>
-                  <a:srgbClr val="1B2A4A"/>
-                </a:solidFill>
-                <a:latin typeface="Calibri" pitchFamily="34" charset="0"/>
-                <a:ea typeface="Calibri" pitchFamily="34" charset="-122"/>
-                <a:cs typeface="Calibri" pitchFamily="34" charset="-120"/>
-              </a:rPr>
-              <a:t>Critique the spec your team set aside on Day 1 for over- or under-specification issues, now that you have a few days of hindsight. Rewrite it and re-run it through your agentic coding tool to compare output quality before and after.</a:t>
-            </a:r>
-            <a:endParaRPr lang="en-US" sz="1700" dirty="0"/>
-          </a:p>
-        </p:txBody>
-      </p:sp>
-      <p:sp>
-        <p:nvSpPr>
-          <p:cNvPr id="5" name="Text 3"/>
-          <p:cNvSpPr/>
-          <p:nvPr/>
-        </p:nvSpPr>
-        <p:spPr>
-          <a:xfrm>
-            <a:off x="548640" y="4480560"/>
-            <a:ext cx="11094415" cy="457200"/>
-          </a:xfrm>
-          <a:prstGeom prst="rect">
-            <a:avLst/>
-          </a:prstGeom>
-          <a:noFill/>
-          <a:ln/>
-        </p:spPr>
-        <p:txBody>
-          <a:bodyPr wrap="square" rtlCol="0" anchor="ctr"/>
-          <a:lstStyle/>
-          <a:p>
-            <a:pPr algn="ctr" indent="0" marL="0">
-              <a:buNone/>
-            </a:pPr>
-            <a:r>
-              <a:rPr lang="en-US" sz="1300" i="1" dirty="0">
-                <a:solidFill>
-                  <a:srgbClr val="5A6B85"/>
-                </a:solidFill>
-                <a:latin typeface="Calibri" pitchFamily="34" charset="0"/>
-                <a:ea typeface="Calibri" pitchFamily="34" charset="-122"/>
-                <a:cs typeface="Calibri" pitchFamily="34" charset="-120"/>
-              </a:rPr>
-              <a:t>This is the final module before the Capstone Project.</a:t>
-            </a:r>
-            <a:endParaRPr lang="en-US" sz="1300" dirty="0"/>
-          </a:p>
-        </p:txBody>
-      </p:sp>
-      <p:sp>
-        <p:nvSpPr>
-          <p:cNvPr id="6" name="Text 4"/>
-          <p:cNvSpPr/>
-          <p:nvPr/>
-        </p:nvSpPr>
-        <p:spPr>
-          <a:xfrm>
-            <a:off x="548640" y="6473952"/>
-            <a:ext cx="5486400" cy="274320"/>
-          </a:xfrm>
-          <a:prstGeom prst="rect">
-            <a:avLst/>
-          </a:prstGeom>
-          <a:noFill/>
-          <a:ln/>
-        </p:spPr>
-        <p:txBody>
-          <a:bodyPr wrap="square" rtlCol="0" anchor="ctr"/>
-          <a:lstStyle/>
-          <a:p>
-            <a:pPr algn="l" indent="0" marL="0">
-              <a:buNone/>
-            </a:pPr>
-            <a:r>
-              <a:rPr lang="en-US" sz="1000" dirty="0">
-                <a:solidFill>
-                  <a:srgbClr val="5A6B85"/>
-                </a:solidFill>
-                <a:latin typeface="Calibri" pitchFamily="34" charset="0"/>
-                <a:ea typeface="Calibri" pitchFamily="34" charset="-122"/>
-                <a:cs typeface="Calibri" pitchFamily="34" charset="-120"/>
-              </a:rPr>
-              <a:t>Module 8</a:t>
-            </a:r>
-            <a:endParaRPr lang="en-US" sz="1000" dirty="0"/>
-          </a:p>
-        </p:txBody>
-      </p:sp>
-      <p:sp>
-        <p:nvSpPr>
-          <p:cNvPr id="7" name="Text 5"/>
-          <p:cNvSpPr/>
-          <p:nvPr/>
-        </p:nvSpPr>
-        <p:spPr>
-          <a:xfrm>
-            <a:off x="6156655" y="6473952"/>
-            <a:ext cx="5486400" cy="274320"/>
-          </a:xfrm>
-          <a:prstGeom prst="rect">
-            <a:avLst/>
-          </a:prstGeom>
-          <a:noFill/>
-          <a:ln/>
-        </p:spPr>
-        <p:txBody>
-          <a:bodyPr wrap="square" rtlCol="0" anchor="ctr"/>
-          <a:lstStyle/>
-          <a:p>
-            <a:pPr algn="r" indent="0" marL="0">
-              <a:buNone/>
-            </a:pPr>
-            <a:r>
-              <a:rPr lang="en-US" sz="1000" dirty="0">
-                <a:solidFill>
-                  <a:srgbClr val="5A6B85"/>
-                </a:solidFill>
-                <a:latin typeface="Calibri" pitchFamily="34" charset="0"/>
-                <a:ea typeface="Calibri" pitchFamily="34" charset="-122"/>
-                <a:cs typeface="Calibri" pitchFamily="34" charset="-120"/>
-              </a:rPr>
-              <a:t>Spec-Driven Development with Agentic AI</a:t>
-            </a:r>
-            <a:endParaRPr lang="en-US" sz="1000" dirty="0"/>
-          </a:p>
-        </p:txBody>
-      </p:sp>
-    </p:spTree>
-  </p:cSld>
-  <p:clrMapOvr>
-    <a:masterClrMapping/>
-  </p:clrMapOvr>
-</p:sld>
-</file>
-
 <file path=ppt/slides/slide2.xml><?xml version="1.0" encoding="utf-8"?>
 <p:sld xmlns:a="http://schemas.openxmlformats.org/drawingml/2006/main" xmlns:r="http://schemas.openxmlformats.org/officeDocument/2006/relationships" xmlns:p="http://schemas.openxmlformats.org/presentationml/2006/main">
   <p:cSld name="Slide 2">
@@ -5458,7 +5115,7 @@
                 <a:ea typeface="Calibri" pitchFamily="34" charset="-122"/>
                 <a:cs typeface="Calibri" pitchFamily="34" charset="-120"/>
               </a:rPr>
-              <a:t>Skipping converge: </a:t>
+              <a:t>Stale checklist: </a:t>
             </a:r>
             <a:pPr indent="0" marL="0">
               <a:buNone/>
@@ -5472,7 +5129,7 @@
                 <a:ea typeface="Calibri" pitchFamily="34" charset="-122"/>
                 <a:cs typeface="Calibri" pitchFamily="34" charset="-120"/>
               </a:rPr>
-              <a:t>Stopping after one /speckit.implement pass without running /speckit.converge: gaps go unnoticed because nothing forced a second look.</a:t>
+              <a:t>Treating a passed checklist as permanently done rather than re-running it after changes: a checklist reflects the spec at the moment it was generated, and later edits can silently invalidate it.</a:t>
             </a:r>
             <a:endParaRPr lang="en-US" sz="1400" dirty="0"/>
           </a:p>

--- a/presentation/Module-8_Common-Pitfalls-and-Anti-Patterns.pptx
+++ b/presentation/Module-8_Common-Pitfalls-and-Anti-Patterns.pptx
@@ -1456,6 +1456,54 @@
           <a:chExt cx="0" cy="0"/>
         </a:xfrm>
       </p:grpSpPr>
+      <p:sp>
+        <p:nvSpPr>
+          <p:cNvPr id="25" name="Slide Number Placeholder 0"/>
+          <p:cNvSpPr>
+            <a:spLocks noGrp="1"/>
+          </p:cNvSpPr>
+          <p:nvPr>
+            <p:ph type="sldNum" sz="quarter" idx="4294967295"/>
+          </p:nvPr>
+        </p:nvSpPr>
+        <p:spPr>
+          <a:xfrm>
+            <a:off x="5821528" y="6473952"/>
+            <a:ext cx="548640" cy="274320"/>
+          </a:xfrm>
+          <a:prstGeom prst="rect">
+            <a:avLst/>
+          </a:prstGeom>
+          <a:extLst>
+            <a:ext uri="{C572A759-6A51-4108-AA02-DFA0A04FC94B}">
+              <ma14:wrappingTextBoxFlag xmlns:ma14="http://schemas.microsoft.com/office/mac/drawingml/2011/main" val="0"/>
+            </a:ext>
+          </a:extLst>
+        </p:spPr>
+        <p:txBody>
+          <a:bodyPr anchor="ctr"/>
+          <a:lstStyle>
+            <a:lvl1pPr>
+              <a:defRPr sz="1000">
+                <a:solidFill>
+                  <a:srgbClr val="8CA3C7"/>
+                </a:solidFill>
+                <a:latin typeface="Calibri"/>
+                <a:ea typeface="Calibri"/>
+                <a:cs typeface="Calibri"/>
+              </a:defRPr>
+            </a:lvl1pPr>
+          </a:lstStyle>
+          <a:p>
+            <a:pPr algn="ctr"/>
+            <a:fld id="{F7021451-1387-4CA6-816F-3879F97B5CBC}" type="slidenum">
+              <a:rPr b="0" lang="en-US"/>
+              <a:t>1000</a:t>
+            </a:fld>
+            <a:endParaRPr lang="en-US"/>
+          </a:p>
+        </p:txBody>
+      </p:sp>
     </p:spTree>
   </p:cSld>
   <p:clrMapOvr>
@@ -1481,6 +1529,54 @@
           <a:chExt cx="0" cy="0"/>
         </a:xfrm>
       </p:grpSpPr>
+      <p:sp>
+        <p:nvSpPr>
+          <p:cNvPr id="25" name="Slide Number Placeholder 0"/>
+          <p:cNvSpPr>
+            <a:spLocks noGrp="1"/>
+          </p:cNvSpPr>
+          <p:nvPr>
+            <p:ph type="sldNum" sz="quarter" idx="4294967295"/>
+          </p:nvPr>
+        </p:nvSpPr>
+        <p:spPr>
+          <a:xfrm>
+            <a:off x="5821528" y="6473952"/>
+            <a:ext cx="548640" cy="274320"/>
+          </a:xfrm>
+          <a:prstGeom prst="rect">
+            <a:avLst/>
+          </a:prstGeom>
+          <a:extLst>
+            <a:ext uri="{C572A759-6A51-4108-AA02-DFA0A04FC94B}">
+              <ma14:wrappingTextBoxFlag xmlns:ma14="http://schemas.microsoft.com/office/mac/drawingml/2011/main" val="0"/>
+            </a:ext>
+          </a:extLst>
+        </p:spPr>
+        <p:txBody>
+          <a:bodyPr anchor="ctr"/>
+          <a:lstStyle>
+            <a:lvl1pPr>
+              <a:defRPr sz="1000">
+                <a:solidFill>
+                  <a:srgbClr val="8CA3C7"/>
+                </a:solidFill>
+                <a:latin typeface="Calibri"/>
+                <a:ea typeface="Calibri"/>
+                <a:cs typeface="Calibri"/>
+              </a:defRPr>
+            </a:lvl1pPr>
+          </a:lstStyle>
+          <a:p>
+            <a:pPr algn="ctr"/>
+            <a:fld id="{F7021451-1387-4CA6-816F-3879F97B5CBC}" type="slidenum">
+              <a:rPr b="0" lang="en-US"/>
+              <a:t>null</a:t>
+            </a:fld>
+            <a:endParaRPr lang="en-US"/>
+          </a:p>
+        </p:txBody>
+      </p:sp>
     </p:spTree>
   </p:cSld>
   <p:clrMap bg1="lt1" tx1="dk1" bg2="lt2" tx2="dk2" accent1="accent1" accent2="accent2" accent3="accent3" accent4="accent4" accent5="accent5" accent6="accent6" hlink="hlink" folHlink="folHlink"/>
@@ -1983,6 +2079,54 @@
               <a:t>Most anti-patterns are earlier shortcuts catching up with you.</a:t>
             </a:r>
             <a:endParaRPr lang="en-US" sz="1800" dirty="0"/>
+          </a:p>
+        </p:txBody>
+      </p:sp>
+      <p:sp>
+        <p:nvSpPr>
+          <p:cNvPr id="25" name="Slide Number Placeholder 0"/>
+          <p:cNvSpPr>
+            <a:spLocks noGrp="1"/>
+          </p:cNvSpPr>
+          <p:nvPr>
+            <p:ph type="sldNum" sz="quarter" idx="4294967295"/>
+          </p:nvPr>
+        </p:nvSpPr>
+        <p:spPr>
+          <a:xfrm>
+            <a:off x="5821528" y="6473952"/>
+            <a:ext cx="548640" cy="274320"/>
+          </a:xfrm>
+          <a:prstGeom prst="rect">
+            <a:avLst/>
+          </a:prstGeom>
+          <a:extLst>
+            <a:ext uri="{C572A759-6A51-4108-AA02-DFA0A04FC94B}">
+              <ma14:wrappingTextBoxFlag xmlns:ma14="http://schemas.microsoft.com/office/mac/drawingml/2011/main" val="0"/>
+            </a:ext>
+          </a:extLst>
+        </p:spPr>
+        <p:txBody>
+          <a:bodyPr anchor="ctr"/>
+          <a:lstStyle>
+            <a:lvl1pPr>
+              <a:defRPr sz="1000">
+                <a:solidFill>
+                  <a:srgbClr val="8CA3C7"/>
+                </a:solidFill>
+                <a:latin typeface="Calibri"/>
+                <a:ea typeface="Calibri"/>
+                <a:cs typeface="Calibri"/>
+              </a:defRPr>
+            </a:lvl1pPr>
+          </a:lstStyle>
+          <a:p>
+            <a:pPr algn="ctr"/>
+            <a:fld id="{F7021451-1387-4CA6-816F-3879F97B5CBC}" type="slidenum">
+              <a:rPr b="0" lang="en-US"/>
+              <a:t>1</a:t>
+            </a:fld>
+            <a:endParaRPr lang="en-US"/>
           </a:p>
         </p:txBody>
       </p:sp>
@@ -2961,6 +3105,54 @@
           </a:p>
         </p:txBody>
       </p:sp>
+      <p:sp>
+        <p:nvSpPr>
+          <p:cNvPr id="25" name="Slide Number Placeholder 0"/>
+          <p:cNvSpPr>
+            <a:spLocks noGrp="1"/>
+          </p:cNvSpPr>
+          <p:nvPr>
+            <p:ph type="sldNum" sz="quarter" idx="4294967295"/>
+          </p:nvPr>
+        </p:nvSpPr>
+        <p:spPr>
+          <a:xfrm>
+            <a:off x="5821528" y="6473952"/>
+            <a:ext cx="548640" cy="274320"/>
+          </a:xfrm>
+          <a:prstGeom prst="rect">
+            <a:avLst/>
+          </a:prstGeom>
+          <a:extLst>
+            <a:ext uri="{C572A759-6A51-4108-AA02-DFA0A04FC94B}">
+              <ma14:wrappingTextBoxFlag xmlns:ma14="http://schemas.microsoft.com/office/mac/drawingml/2011/main" val="0"/>
+            </a:ext>
+          </a:extLst>
+        </p:spPr>
+        <p:txBody>
+          <a:bodyPr anchor="ctr"/>
+          <a:lstStyle>
+            <a:lvl1pPr>
+              <a:defRPr sz="1000">
+                <a:solidFill>
+                  <a:srgbClr val="5A6B85"/>
+                </a:solidFill>
+                <a:latin typeface="Calibri"/>
+                <a:ea typeface="Calibri"/>
+                <a:cs typeface="Calibri"/>
+              </a:defRPr>
+            </a:lvl1pPr>
+          </a:lstStyle>
+          <a:p>
+            <a:pPr algn="ctr"/>
+            <a:fld id="{F7021451-1387-4CA6-816F-3879F97B5CBC}" type="slidenum">
+              <a:rPr b="0" lang="en-US"/>
+              <a:t>10</a:t>
+            </a:fld>
+            <a:endParaRPr lang="en-US"/>
+          </a:p>
+        </p:txBody>
+      </p:sp>
     </p:spTree>
   </p:cSld>
   <p:clrMapOvr>
@@ -3287,6 +3479,54 @@
           </a:p>
         </p:txBody>
       </p:sp>
+      <p:sp>
+        <p:nvSpPr>
+          <p:cNvPr id="25" name="Slide Number Placeholder 0"/>
+          <p:cNvSpPr>
+            <a:spLocks noGrp="1"/>
+          </p:cNvSpPr>
+          <p:nvPr>
+            <p:ph type="sldNum" sz="quarter" idx="4294967295"/>
+          </p:nvPr>
+        </p:nvSpPr>
+        <p:spPr>
+          <a:xfrm>
+            <a:off x="5821528" y="6473952"/>
+            <a:ext cx="548640" cy="274320"/>
+          </a:xfrm>
+          <a:prstGeom prst="rect">
+            <a:avLst/>
+          </a:prstGeom>
+          <a:extLst>
+            <a:ext uri="{C572A759-6A51-4108-AA02-DFA0A04FC94B}">
+              <ma14:wrappingTextBoxFlag xmlns:ma14="http://schemas.microsoft.com/office/mac/drawingml/2011/main" val="0"/>
+            </a:ext>
+          </a:extLst>
+        </p:spPr>
+        <p:txBody>
+          <a:bodyPr anchor="ctr"/>
+          <a:lstStyle>
+            <a:lvl1pPr>
+              <a:defRPr sz="1000">
+                <a:solidFill>
+                  <a:srgbClr val="8CA3C7"/>
+                </a:solidFill>
+                <a:latin typeface="Calibri"/>
+                <a:ea typeface="Calibri"/>
+                <a:cs typeface="Calibri"/>
+              </a:defRPr>
+            </a:lvl1pPr>
+          </a:lstStyle>
+          <a:p>
+            <a:pPr algn="ctr"/>
+            <a:fld id="{F7021451-1387-4CA6-816F-3879F97B5CBC}" type="slidenum">
+              <a:rPr b="0" lang="en-US"/>
+              <a:t>11</a:t>
+            </a:fld>
+            <a:endParaRPr lang="en-US"/>
+          </a:p>
+        </p:txBody>
+      </p:sp>
     </p:spTree>
   </p:cSld>
   <p:clrMapOvr>
@@ -3730,6 +3970,54 @@
           </a:p>
         </p:txBody>
       </p:sp>
+      <p:sp>
+        <p:nvSpPr>
+          <p:cNvPr id="25" name="Slide Number Placeholder 0"/>
+          <p:cNvSpPr>
+            <a:spLocks noGrp="1"/>
+          </p:cNvSpPr>
+          <p:nvPr>
+            <p:ph type="sldNum" sz="quarter" idx="4294967295"/>
+          </p:nvPr>
+        </p:nvSpPr>
+        <p:spPr>
+          <a:xfrm>
+            <a:off x="5821528" y="6473952"/>
+            <a:ext cx="548640" cy="274320"/>
+          </a:xfrm>
+          <a:prstGeom prst="rect">
+            <a:avLst/>
+          </a:prstGeom>
+          <a:extLst>
+            <a:ext uri="{C572A759-6A51-4108-AA02-DFA0A04FC94B}">
+              <ma14:wrappingTextBoxFlag xmlns:ma14="http://schemas.microsoft.com/office/mac/drawingml/2011/main" val="0"/>
+            </a:ext>
+          </a:extLst>
+        </p:spPr>
+        <p:txBody>
+          <a:bodyPr anchor="ctr"/>
+          <a:lstStyle>
+            <a:lvl1pPr>
+              <a:defRPr sz="1000">
+                <a:solidFill>
+                  <a:srgbClr val="5A6B85"/>
+                </a:solidFill>
+                <a:latin typeface="Calibri"/>
+                <a:ea typeface="Calibri"/>
+                <a:cs typeface="Calibri"/>
+              </a:defRPr>
+            </a:lvl1pPr>
+          </a:lstStyle>
+          <a:p>
+            <a:pPr algn="ctr"/>
+            <a:fld id="{F7021451-1387-4CA6-816F-3879F97B5CBC}" type="slidenum">
+              <a:rPr b="0" lang="en-US"/>
+              <a:t>2</a:t>
+            </a:fld>
+            <a:endParaRPr lang="en-US"/>
+          </a:p>
+        </p:txBody>
+      </p:sp>
     </p:spTree>
   </p:cSld>
   <p:clrMapOvr>
@@ -4080,6 +4368,54 @@
           </a:p>
         </p:txBody>
       </p:sp>
+      <p:sp>
+        <p:nvSpPr>
+          <p:cNvPr id="25" name="Slide Number Placeholder 0"/>
+          <p:cNvSpPr>
+            <a:spLocks noGrp="1"/>
+          </p:cNvSpPr>
+          <p:nvPr>
+            <p:ph type="sldNum" sz="quarter" idx="4294967295"/>
+          </p:nvPr>
+        </p:nvSpPr>
+        <p:spPr>
+          <a:xfrm>
+            <a:off x="5821528" y="6473952"/>
+            <a:ext cx="548640" cy="274320"/>
+          </a:xfrm>
+          <a:prstGeom prst="rect">
+            <a:avLst/>
+          </a:prstGeom>
+          <a:extLst>
+            <a:ext uri="{C572A759-6A51-4108-AA02-DFA0A04FC94B}">
+              <ma14:wrappingTextBoxFlag xmlns:ma14="http://schemas.microsoft.com/office/mac/drawingml/2011/main" val="0"/>
+            </a:ext>
+          </a:extLst>
+        </p:spPr>
+        <p:txBody>
+          <a:bodyPr anchor="ctr"/>
+          <a:lstStyle>
+            <a:lvl1pPr>
+              <a:defRPr sz="1000">
+                <a:solidFill>
+                  <a:srgbClr val="5A6B85"/>
+                </a:solidFill>
+                <a:latin typeface="Calibri"/>
+                <a:ea typeface="Calibri"/>
+                <a:cs typeface="Calibri"/>
+              </a:defRPr>
+            </a:lvl1pPr>
+          </a:lstStyle>
+          <a:p>
+            <a:pPr algn="ctr"/>
+            <a:fld id="{F7021451-1387-4CA6-816F-3879F97B5CBC}" type="slidenum">
+              <a:rPr b="0" lang="en-US"/>
+              <a:t>3</a:t>
+            </a:fld>
+            <a:endParaRPr lang="en-US"/>
+          </a:p>
+        </p:txBody>
+      </p:sp>
     </p:spTree>
   </p:cSld>
   <p:clrMapOvr>
@@ -4430,6 +4766,54 @@
           </a:p>
         </p:txBody>
       </p:sp>
+      <p:sp>
+        <p:nvSpPr>
+          <p:cNvPr id="25" name="Slide Number Placeholder 0"/>
+          <p:cNvSpPr>
+            <a:spLocks noGrp="1"/>
+          </p:cNvSpPr>
+          <p:nvPr>
+            <p:ph type="sldNum" sz="quarter" idx="4294967295"/>
+          </p:nvPr>
+        </p:nvSpPr>
+        <p:spPr>
+          <a:xfrm>
+            <a:off x="5821528" y="6473952"/>
+            <a:ext cx="548640" cy="274320"/>
+          </a:xfrm>
+          <a:prstGeom prst="rect">
+            <a:avLst/>
+          </a:prstGeom>
+          <a:extLst>
+            <a:ext uri="{C572A759-6A51-4108-AA02-DFA0A04FC94B}">
+              <ma14:wrappingTextBoxFlag xmlns:ma14="http://schemas.microsoft.com/office/mac/drawingml/2011/main" val="0"/>
+            </a:ext>
+          </a:extLst>
+        </p:spPr>
+        <p:txBody>
+          <a:bodyPr anchor="ctr"/>
+          <a:lstStyle>
+            <a:lvl1pPr>
+              <a:defRPr sz="1000">
+                <a:solidFill>
+                  <a:srgbClr val="5A6B85"/>
+                </a:solidFill>
+                <a:latin typeface="Calibri"/>
+                <a:ea typeface="Calibri"/>
+                <a:cs typeface="Calibri"/>
+              </a:defRPr>
+            </a:lvl1pPr>
+          </a:lstStyle>
+          <a:p>
+            <a:pPr algn="ctr"/>
+            <a:fld id="{F7021451-1387-4CA6-816F-3879F97B5CBC}" type="slidenum">
+              <a:rPr b="0" lang="en-US"/>
+              <a:t>4</a:t>
+            </a:fld>
+            <a:endParaRPr lang="en-US"/>
+          </a:p>
+        </p:txBody>
+      </p:sp>
     </p:spTree>
   </p:cSld>
   <p:clrMapOvr>
@@ -4740,6 +5124,54 @@
           </a:p>
         </p:txBody>
       </p:sp>
+      <p:sp>
+        <p:nvSpPr>
+          <p:cNvPr id="25" name="Slide Number Placeholder 0"/>
+          <p:cNvSpPr>
+            <a:spLocks noGrp="1"/>
+          </p:cNvSpPr>
+          <p:nvPr>
+            <p:ph type="sldNum" sz="quarter" idx="4294967295"/>
+          </p:nvPr>
+        </p:nvSpPr>
+        <p:spPr>
+          <a:xfrm>
+            <a:off x="5821528" y="6473952"/>
+            <a:ext cx="548640" cy="274320"/>
+          </a:xfrm>
+          <a:prstGeom prst="rect">
+            <a:avLst/>
+          </a:prstGeom>
+          <a:extLst>
+            <a:ext uri="{C572A759-6A51-4108-AA02-DFA0A04FC94B}">
+              <ma14:wrappingTextBoxFlag xmlns:ma14="http://schemas.microsoft.com/office/mac/drawingml/2011/main" val="0"/>
+            </a:ext>
+          </a:extLst>
+        </p:spPr>
+        <p:txBody>
+          <a:bodyPr anchor="ctr"/>
+          <a:lstStyle>
+            <a:lvl1pPr>
+              <a:defRPr sz="1000">
+                <a:solidFill>
+                  <a:srgbClr val="8CA3C7"/>
+                </a:solidFill>
+                <a:latin typeface="Calibri"/>
+                <a:ea typeface="Calibri"/>
+                <a:cs typeface="Calibri"/>
+              </a:defRPr>
+            </a:lvl1pPr>
+          </a:lstStyle>
+          <a:p>
+            <a:pPr algn="ctr"/>
+            <a:fld id="{F7021451-1387-4CA6-816F-3879F97B5CBC}" type="slidenum">
+              <a:rPr b="0" lang="en-US"/>
+              <a:t>5</a:t>
+            </a:fld>
+            <a:endParaRPr lang="en-US"/>
+          </a:p>
+        </p:txBody>
+      </p:sp>
     </p:spTree>
   </p:cSld>
   <p:clrMapOvr>
@@ -4805,7 +5237,7 @@
                 <a:ea typeface="Calibri" pitchFamily="34" charset="-122"/>
                 <a:cs typeface="Calibri" pitchFamily="34" charset="-120"/>
               </a:rPr>
-              <a:t>APPLYING THIS WITH</a:t>
+              <a:t>APPLYING THE CONCEPTS</a:t>
             </a:r>
             <a:endParaRPr lang="en-US" sz="1400" dirty="0"/>
           </a:p>
@@ -4925,6 +5357,54 @@
               <a:t>Spec-Driven Development with Agentic AI</a:t>
             </a:r>
             <a:endParaRPr lang="en-US" sz="1000" dirty="0"/>
+          </a:p>
+        </p:txBody>
+      </p:sp>
+      <p:sp>
+        <p:nvSpPr>
+          <p:cNvPr id="25" name="Slide Number Placeholder 0"/>
+          <p:cNvSpPr>
+            <a:spLocks noGrp="1"/>
+          </p:cNvSpPr>
+          <p:nvPr>
+            <p:ph type="sldNum" sz="quarter" idx="4294967295"/>
+          </p:nvPr>
+        </p:nvSpPr>
+        <p:spPr>
+          <a:xfrm>
+            <a:off x="5821528" y="6473952"/>
+            <a:ext cx="548640" cy="274320"/>
+          </a:xfrm>
+          <a:prstGeom prst="rect">
+            <a:avLst/>
+          </a:prstGeom>
+          <a:extLst>
+            <a:ext uri="{C572A759-6A51-4108-AA02-DFA0A04FC94B}">
+              <ma14:wrappingTextBoxFlag xmlns:ma14="http://schemas.microsoft.com/office/mac/drawingml/2011/main" val="0"/>
+            </a:ext>
+          </a:extLst>
+        </p:spPr>
+        <p:txBody>
+          <a:bodyPr anchor="ctr"/>
+          <a:lstStyle>
+            <a:lvl1pPr>
+              <a:defRPr sz="1000">
+                <a:solidFill>
+                  <a:srgbClr val="8CA3C7"/>
+                </a:solidFill>
+                <a:latin typeface="Calibri"/>
+                <a:ea typeface="Calibri"/>
+                <a:cs typeface="Calibri"/>
+              </a:defRPr>
+            </a:lvl1pPr>
+          </a:lstStyle>
+          <a:p>
+            <a:pPr algn="ctr"/>
+            <a:fld id="{F7021451-1387-4CA6-816F-3879F97B5CBC}" type="slidenum">
+              <a:rPr b="0" lang="en-US"/>
+              <a:t>6</a:t>
+            </a:fld>
+            <a:endParaRPr lang="en-US"/>
           </a:p>
         </p:txBody>
       </p:sp>
@@ -5288,6 +5768,54 @@
           </a:p>
         </p:txBody>
       </p:sp>
+      <p:sp>
+        <p:nvSpPr>
+          <p:cNvPr id="25" name="Slide Number Placeholder 0"/>
+          <p:cNvSpPr>
+            <a:spLocks noGrp="1"/>
+          </p:cNvSpPr>
+          <p:nvPr>
+            <p:ph type="sldNum" sz="quarter" idx="4294967295"/>
+          </p:nvPr>
+        </p:nvSpPr>
+        <p:spPr>
+          <a:xfrm>
+            <a:off x="5821528" y="6473952"/>
+            <a:ext cx="548640" cy="274320"/>
+          </a:xfrm>
+          <a:prstGeom prst="rect">
+            <a:avLst/>
+          </a:prstGeom>
+          <a:extLst>
+            <a:ext uri="{C572A759-6A51-4108-AA02-DFA0A04FC94B}">
+              <ma14:wrappingTextBoxFlag xmlns:ma14="http://schemas.microsoft.com/office/mac/drawingml/2011/main" val="0"/>
+            </a:ext>
+          </a:extLst>
+        </p:spPr>
+        <p:txBody>
+          <a:bodyPr anchor="ctr"/>
+          <a:lstStyle>
+            <a:lvl1pPr>
+              <a:defRPr sz="1000">
+                <a:solidFill>
+                  <a:srgbClr val="5A6B85"/>
+                </a:solidFill>
+                <a:latin typeface="Calibri"/>
+                <a:ea typeface="Calibri"/>
+                <a:cs typeface="Calibri"/>
+              </a:defRPr>
+            </a:lvl1pPr>
+          </a:lstStyle>
+          <a:p>
+            <a:pPr algn="ctr"/>
+            <a:fld id="{F7021451-1387-4CA6-816F-3879F97B5CBC}" type="slidenum">
+              <a:rPr b="0" lang="en-US"/>
+              <a:t>7</a:t>
+            </a:fld>
+            <a:endParaRPr lang="en-US"/>
+          </a:p>
+        </p:txBody>
+      </p:sp>
     </p:spTree>
   </p:cSld>
   <p:clrMapOvr>
@@ -5353,7 +5881,7 @@
                 <a:ea typeface="Calibri" pitchFamily="34" charset="-122"/>
                 <a:cs typeface="Calibri" pitchFamily="34" charset="-120"/>
               </a:rPr>
-              <a:t>APPLYING THIS WITH</a:t>
+              <a:t>APPLYING THE CONCEPTS</a:t>
             </a:r>
             <a:endParaRPr lang="en-US" sz="1400" dirty="0"/>
           </a:p>
@@ -5473,6 +6001,54 @@
               <a:t>Spec-Driven Development with Agentic AI</a:t>
             </a:r>
             <a:endParaRPr lang="en-US" sz="1000" dirty="0"/>
+          </a:p>
+        </p:txBody>
+      </p:sp>
+      <p:sp>
+        <p:nvSpPr>
+          <p:cNvPr id="25" name="Slide Number Placeholder 0"/>
+          <p:cNvSpPr>
+            <a:spLocks noGrp="1"/>
+          </p:cNvSpPr>
+          <p:nvPr>
+            <p:ph type="sldNum" sz="quarter" idx="4294967295"/>
+          </p:nvPr>
+        </p:nvSpPr>
+        <p:spPr>
+          <a:xfrm>
+            <a:off x="5821528" y="6473952"/>
+            <a:ext cx="548640" cy="274320"/>
+          </a:xfrm>
+          <a:prstGeom prst="rect">
+            <a:avLst/>
+          </a:prstGeom>
+          <a:extLst>
+            <a:ext uri="{C572A759-6A51-4108-AA02-DFA0A04FC94B}">
+              <ma14:wrappingTextBoxFlag xmlns:ma14="http://schemas.microsoft.com/office/mac/drawingml/2011/main" val="0"/>
+            </a:ext>
+          </a:extLst>
+        </p:spPr>
+        <p:txBody>
+          <a:bodyPr anchor="ctr"/>
+          <a:lstStyle>
+            <a:lvl1pPr>
+              <a:defRPr sz="1000">
+                <a:solidFill>
+                  <a:srgbClr val="8CA3C7"/>
+                </a:solidFill>
+                <a:latin typeface="Calibri"/>
+                <a:ea typeface="Calibri"/>
+                <a:cs typeface="Calibri"/>
+              </a:defRPr>
+            </a:lvl1pPr>
+          </a:lstStyle>
+          <a:p>
+            <a:pPr algn="ctr"/>
+            <a:fld id="{F7021451-1387-4CA6-816F-3879F97B5CBC}" type="slidenum">
+              <a:rPr b="0" lang="en-US"/>
+              <a:t>8</a:t>
+            </a:fld>
+            <a:endParaRPr lang="en-US"/>
           </a:p>
         </p:txBody>
       </p:sp>
@@ -5880,6 +6456,54 @@
               <a:t>Spec-Driven Development with Agentic AI</a:t>
             </a:r>
             <a:endParaRPr lang="en-US" sz="1000" dirty="0"/>
+          </a:p>
+        </p:txBody>
+      </p:sp>
+      <p:sp>
+        <p:nvSpPr>
+          <p:cNvPr id="25" name="Slide Number Placeholder 0"/>
+          <p:cNvSpPr>
+            <a:spLocks noGrp="1"/>
+          </p:cNvSpPr>
+          <p:nvPr>
+            <p:ph type="sldNum" sz="quarter" idx="4294967295"/>
+          </p:nvPr>
+        </p:nvSpPr>
+        <p:spPr>
+          <a:xfrm>
+            <a:off x="5821528" y="6473952"/>
+            <a:ext cx="548640" cy="274320"/>
+          </a:xfrm>
+          <a:prstGeom prst="rect">
+            <a:avLst/>
+          </a:prstGeom>
+          <a:extLst>
+            <a:ext uri="{C572A759-6A51-4108-AA02-DFA0A04FC94B}">
+              <ma14:wrappingTextBoxFlag xmlns:ma14="http://schemas.microsoft.com/office/mac/drawingml/2011/main" val="0"/>
+            </a:ext>
+          </a:extLst>
+        </p:spPr>
+        <p:txBody>
+          <a:bodyPr anchor="ctr"/>
+          <a:lstStyle>
+            <a:lvl1pPr>
+              <a:defRPr sz="1000">
+                <a:solidFill>
+                  <a:srgbClr val="5A6B85"/>
+                </a:solidFill>
+                <a:latin typeface="Calibri"/>
+                <a:ea typeface="Calibri"/>
+                <a:cs typeface="Calibri"/>
+              </a:defRPr>
+            </a:lvl1pPr>
+          </a:lstStyle>
+          <a:p>
+            <a:pPr algn="ctr"/>
+            <a:fld id="{F7021451-1387-4CA6-816F-3879F97B5CBC}" type="slidenum">
+              <a:rPr b="0" lang="en-US"/>
+              <a:t>9</a:t>
+            </a:fld>
+            <a:endParaRPr lang="en-US"/>
           </a:p>
         </p:txBody>
       </p:sp>

--- a/presentation/Module-8_Common-Pitfalls-and-Anti-Patterns.pptx
+++ b/presentation/Module-8_Common-Pitfalls-and-Anti-Patterns.pptx
@@ -3277,7 +3277,7 @@
                 <a:ea typeface="Calibri" pitchFamily="34" charset="-122"/>
                 <a:cs typeface="Calibri" pitchFamily="34" charset="-120"/>
               </a:rPr>
-              <a:t>Anti-patterns are rarely new mistakes; they're earlier shortcuts catching up with you.</a:t>
+              <a:t>Anti-patterns are rarely new mistakes; they're earlier shortcuts catching up with you later in the lifecycle.</a:t>
             </a:r>
             <a:endParaRPr lang="en-US" sz="1700" dirty="0"/>
           </a:p>
@@ -3336,7 +3336,7 @@
                 <a:ea typeface="Calibri" pitchFamily="34" charset="-122"/>
                 <a:cs typeface="Calibri" pitchFamily="34" charset="-120"/>
               </a:rPr>
-              <a:t>Every framework gate you skip is a bet that nothing needed catching.</a:t>
+              <a:t>Every framework gate you skip is a bet that nothing needed catching, and that bet doesn't always pay off.</a:t>
             </a:r>
             <a:endParaRPr lang="en-US" sz="1700" dirty="0"/>
           </a:p>
@@ -3395,7 +3395,7 @@
                 <a:ea typeface="Calibri" pitchFamily="34" charset="-122"/>
                 <a:cs typeface="Calibri" pitchFamily="34" charset="-120"/>
               </a:rPr>
-              <a:t>Case studies at scale tend to share one pattern: the team that skipped a gate is the team that got surprised later.</a:t>
+              <a:t>Case studies at scale tend to share one pattern: the team that skipped a gate is the team that got surprised later, often at a worse time than if they'd caught it early.</a:t>
             </a:r>
             <a:endParaRPr lang="en-US" sz="1700" dirty="0"/>
           </a:p>
@@ -4203,7 +4203,7 @@
                 <a:ea typeface="Calibri" pitchFamily="34" charset="-122"/>
                 <a:cs typeface="Calibri" pitchFamily="34" charset="-120"/>
               </a:rPr>
-              <a:t>Too much detail in a spec or plan slows everyone down and gets stale fast; too little pushes ambiguity downstream where it's more expensive to fix.</a:t>
+              <a:t>Too much detail in a spec or plan slows everyone down and gets stale fast; too little pushes ambiguity downstream where it's more expensive to fix, so the goal is the least detail that still makes the requirement testable.</a:t>
             </a:r>
             <a:endParaRPr lang="en-US" sz="1500" dirty="0"/>
           </a:p>
@@ -4284,7 +4284,7 @@
                 <a:ea typeface="Calibri" pitchFamily="34" charset="-122"/>
                 <a:cs typeface="Calibri" pitchFamily="34" charset="-120"/>
               </a:rPr>
-              <a:t>A thin constitution or a skipped clarify pass usually shows up here first: problems from earlier modules resurface as anti-patterns later.</a:t>
+              <a:t>A thin constitution or a skipped clarify pass usually shows up here first: problems from earlier modules resurface as anti-patterns later, which is why this module is really a look back at the whole lifecycle.</a:t>
             </a:r>
             <a:endParaRPr lang="en-US" sz="1500" dirty="0"/>
           </a:p>
@@ -4601,7 +4601,7 @@
                 <a:ea typeface="Calibri" pitchFamily="34" charset="-122"/>
                 <a:cs typeface="Calibri" pitchFamily="34" charset="-120"/>
               </a:rPr>
-              <a:t>More tokens spent up front on a clear spec and plan is typically offset by far fewer rework cycles.</a:t>
+              <a:t>More tokens spent up front on a clear spec and plan is typically offset by far fewer rework cycles, the same tradeoff introduced in Module 5, now viewed with the benefit of hindsight.</a:t>
             </a:r>
             <a:endParaRPr lang="en-US" sz="1500" dirty="0"/>
           </a:p>
@@ -4682,7 +4682,7 @@
                 <a:ea typeface="Calibri" pitchFamily="34" charset="-122"/>
                 <a:cs typeface="Calibri" pitchFamily="34" charset="-120"/>
               </a:rPr>
-              <a:t>Treat this as a deliberate tradeoff to manage, not a cost to minimize blindly.</a:t>
+              <a:t>Treat this as a deliberate tradeoff to manage, not a cost to minimize blindly, since minimizing spend on planning is often what causes the expensive rework in the first place.</a:t>
             </a:r>
             <a:endParaRPr lang="en-US" sz="1500" dirty="0"/>
           </a:p>
@@ -4979,7 +4979,7 @@
                 <a:ea typeface="Calibri" pitchFamily="34" charset="-122"/>
                 <a:cs typeface="Calibri" pitchFamily="34" charset="-120"/>
               </a:rPr>
-              <a:t>The team that skips a gate almost never notices until the cost shows up downstream.</a:t>
+              <a:t>The team that skips a gate almost never notices until the cost shows up downstream, often several modules, or several weeks, later.</a:t>
             </a:r>
             <a:endParaRPr lang="en-US" sz="1500" dirty="0"/>
           </a:p>
@@ -5040,7 +5040,7 @@
                 <a:ea typeface="Calibri" pitchFamily="34" charset="-122"/>
                 <a:cs typeface="Calibri" pitchFamily="34" charset="-120"/>
               </a:rPr>
-              <a:t>Treat every skipped step as a deliberate risk decision, not a shortcut.</a:t>
+              <a:t>Treat every skipped step as a deliberate risk decision, not a shortcut, so at least it's a choice the team made knowingly, not one that happened by default.</a:t>
             </a:r>
             <a:endParaRPr lang="en-US" sz="1500" dirty="0"/>
           </a:p>
@@ -5609,7 +5609,7 @@
                 <a:ea typeface="Calibri" pitchFamily="34" charset="-122"/>
                 <a:cs typeface="Calibri" pitchFamily="34" charset="-120"/>
               </a:rPr>
-              <a:t>Treating a passed checklist as permanently done rather than re-running it after changes: a checklist reflects the spec at the moment it was generated, and later edits can silently invalidate it.</a:t>
+              <a:t>Treating a passed checklist as permanently done rather than re-running it after changes: a checklist reflects the spec at the moment it was generated, and later edits can silently invalidate it, so a checklist needs revisiting whenever the spec it was built from changes.</a:t>
             </a:r>
             <a:endParaRPr lang="en-US" sz="1400" dirty="0"/>
           </a:p>
@@ -5684,7 +5684,7 @@
                 <a:ea typeface="Calibri" pitchFamily="34" charset="-122"/>
                 <a:cs typeface="Calibri" pitchFamily="34" charset="-120"/>
               </a:rPr>
-              <a:t>Ignoring /speckit.analyze findings instead of returning to the step that owns them (specify or clarify for requirement problems, plan for design problems) lets small inconsistencies compound.</a:t>
+              <a:t>Ignoring /speckit.analyze findings instead of returning to the step that owns them (specify or clarify for requirement problems, plan for design problems) lets small inconsistencies compound into much larger ones by the time implementation is done.</a:t>
             </a:r>
             <a:endParaRPr lang="en-US" sz="1400" dirty="0"/>
           </a:p>
@@ -6253,7 +6253,7 @@
                 <a:ea typeface="Calibri" pitchFamily="34" charset="-122"/>
                 <a:cs typeface="Calibri" pitchFamily="34" charset="-120"/>
               </a:rPr>
-              <a:t>"Change not found," "No artifacts ready," and "Artifacts not generating properly" are named directly in OpenSpec's own troubleshooting guide. Thin project context in config.yaml is a common root cause.</a:t>
+              <a:t>"Change not found," "No artifacts ready," and "Artifacts not generating properly" are named directly in OpenSpec's own troubleshooting guide. Thin project context in config.yaml is a common root cause, so the fix is often as simple as filling in more project context.</a:t>
             </a:r>
             <a:endParaRPr lang="en-US" sz="1400" dirty="0"/>
           </a:p>
@@ -6375,7 +6375,7 @@
                 <a:ea typeface="Calibri" pitchFamily="34" charset="-122"/>
                 <a:cs typeface="Calibri" pitchFamily="34" charset="-120"/>
               </a:rPr>
-              <a:t>Fast-forward generates every artifact at once. Convenient, but it skips the incremental review that /opsx:continue gives you, an under-specification risk if nobody reads each artifact before the next is generated.</a:t>
+              <a:t>Fast-forward generates every artifact at once. Convenient, but it skips the incremental review that /opsx:continue gives you, an under-specification risk if nobody reads each artifact before the next is generated on top of it.</a:t>
             </a:r>
             <a:endParaRPr lang="en-US" sz="1350" dirty="0"/>
           </a:p>
